--- a/01 Elementi Razvoja Softvera/02 Prezentacije/PPTX/06_Kontrolisan_AI_workflow.pptx
+++ b/01 Elementi Razvoja Softvera/02 Prezentacije/PPTX/06_Kontrolisan_AI_workflow.pptx
@@ -6157,7 +6157,7 @@
                 <a:ea typeface="Aptos"/>
                 <a:cs typeface="Aptos"/>
               </a:rPr>
-              <a:t>Улога</a:t>
+              <a:t>Skill</a:t>
             </a:r>
           </a:p>
         </p:txBody>
@@ -6270,7 +6270,7 @@
                 <a:ea typeface="Aptos"/>
                 <a:cs typeface="Aptos"/>
               </a:rPr>
-              <a:t>Дозволе</a:t>
+              <a:t>Kova режим и дозволе</a:t>
             </a:r>
           </a:p>
         </p:txBody>
@@ -6521,7 +6521,7 @@
                 <a:ea typeface="Aptos"/>
                 <a:cs typeface="Aptos"/>
               </a:rPr>
-              <a:t>reviewer</a:t>
+              <a:t>review</a:t>
             </a:r>
           </a:p>
         </p:txBody>
@@ -6634,7 +6634,7 @@
                 <a:ea typeface="Aptos"/>
                 <a:cs typeface="Aptos"/>
               </a:rPr>
-              <a:t>чита solution, source, инструкције и diff</a:t>
+              <a:t>Plan: чита solution, инструкције и diff</a:t>
             </a:r>
           </a:p>
         </p:txBody>
@@ -6860,7 +6860,7 @@
                 <a:ea typeface="Aptos"/>
                 <a:cs typeface="Aptos"/>
               </a:rPr>
-              <a:t>implementer</a:t>
+              <a:t>implement-plan</a:t>
             </a:r>
           </a:p>
         </p:txBody>
@@ -6973,7 +6973,7 @@
                 <a:ea typeface="Aptos"/>
                 <a:cs typeface="Aptos"/>
               </a:rPr>
-              <a:t>мења фајлове из усвојеног плана</a:t>
+              <a:t>Manual: мења фајлове из усвојеног плана</a:t>
             </a:r>
           </a:p>
         </p:txBody>
@@ -7199,7 +7199,7 @@
                 <a:ea typeface="Aptos"/>
                 <a:cs typeface="Aptos"/>
               </a:rPr>
-              <a:t>test/review</a:t>
+              <a:t>review-PR</a:t>
             </a:r>
           </a:p>
         </p:txBody>
@@ -7312,7 +7312,7 @@
                 <a:ea typeface="Aptos"/>
                 <a:cs typeface="Aptos"/>
               </a:rPr>
-              <a:t>покреће тестове и анализира резултат</a:t>
+              <a:t>Manual: чита diff и покреће тестове</a:t>
             </a:r>
           </a:p>
         </p:txBody>
@@ -8344,51 +8344,18 @@
                 <a:ea typeface="Consolas"/>
                 <a:cs typeface="Consolas"/>
               </a:rPr>
-              <a:t>"</a:t>
-            </a:r>
-            <a:r>
-              <a:rPr sz="1049" b="1">
-                <a:solidFill>
-                  <a:srgbClr val="7442C8"/>
+              <a:t>"No Infrastructure dependency in Domain/Application"</a:t>
+            </a:r>
+            <a:r>
+              <a:rPr sz="1049">
+                <a:solidFill>
+                  <a:srgbClr val="5C6574"/>
                 </a:solidFill>
                 <a:latin typeface="Consolas"/>
                 <a:ea typeface="Consolas"/>
                 <a:cs typeface="Consolas"/>
               </a:rPr>
-              <a:t>Do</a:t>
-            </a:r>
-            <a:r>
-              <a:rPr sz="1049">
-                <a:solidFill>
-                  <a:srgbClr val="262B36"/>
-                </a:solidFill>
-                <a:latin typeface="Consolas"/>
-                <a:ea typeface="Consolas"/>
-                <a:cs typeface="Consolas"/>
-              </a:rPr>
-              <a:t> not add </a:t>
-            </a:r>
-            <a:r>
-              <a:rPr sz="1049" b="1">
-                <a:solidFill>
-                  <a:srgbClr val="7442C8"/>
-                </a:solidFill>
-                <a:latin typeface="Consolas"/>
-                <a:ea typeface="Consolas"/>
-                <a:cs typeface="Consolas"/>
-              </a:rPr>
-              <a:t>Infrastructure</a:t>
-            </a:r>
-            <a:r>
-              <a:rPr sz="1049">
-                <a:solidFill>
-                  <a:srgbClr val="262B36"/>
-                </a:solidFill>
-                <a:latin typeface="Consolas"/>
-                <a:ea typeface="Consolas"/>
-                <a:cs typeface="Consolas"/>
-              </a:rPr>
-              <a:t> dependency to</a:t>
+              <a:t>,</a:t>
             </a:r>
           </a:p>
           <a:p xmlns:a="http://schemas.openxmlformats.org/drawingml/2006/main">
@@ -8424,51 +8391,18 @@
                 <a:ea typeface="Consolas"/>
                 <a:cs typeface="Consolas"/>
               </a:rPr>
-              <a:t>        </a:t>
-            </a:r>
-            <a:r>
-              <a:rPr sz="1049" b="1">
-                <a:solidFill>
-                  <a:srgbClr val="7442C8"/>
+              <a:t>    </a:t>
+            </a:r>
+            <a:r>
+              <a:rPr sz="1049">
+                <a:solidFill>
+                  <a:srgbClr val="A95921"/>
                 </a:solidFill>
                 <a:latin typeface="Consolas"/>
                 <a:ea typeface="Consolas"/>
                 <a:cs typeface="Consolas"/>
               </a:rPr>
-              <a:t>Domain</a:t>
-            </a:r>
-            <a:r>
-              <a:rPr sz="1049">
-                <a:solidFill>
-                  <a:srgbClr val="5C6574"/>
-                </a:solidFill>
-                <a:latin typeface="Consolas"/>
-                <a:ea typeface="Consolas"/>
-                <a:cs typeface="Consolas"/>
-              </a:rPr>
-              <a:t>/</a:t>
-            </a:r>
-            <a:r>
-              <a:rPr sz="1049" b="1">
-                <a:solidFill>
-                  <a:srgbClr val="7442C8"/>
-                </a:solidFill>
-                <a:latin typeface="Consolas"/>
-                <a:ea typeface="Consolas"/>
-                <a:cs typeface="Consolas"/>
-              </a:rPr>
-              <a:t>Application</a:t>
-            </a:r>
-            <a:r>
-              <a:rPr sz="1049">
-                <a:solidFill>
-                  <a:srgbClr val="A95921"/>
-                </a:solidFill>
-                <a:latin typeface="Consolas"/>
-                <a:ea typeface="Consolas"/>
-                <a:cs typeface="Consolas"/>
-              </a:rPr>
-              <a:t>"</a:t>
+              <a:t>"Existing tests stay green"</a:t>
             </a:r>
           </a:p>
           <a:p xmlns:a="http://schemas.openxmlformats.org/drawingml/2006/main">
@@ -8642,7 +8576,7 @@
                 <a:ea typeface="Consolas"/>
                 <a:cs typeface="Consolas"/>
               </a:rPr>
-              <a:t>"src/EquipmentReservation.Domain/InventoryItem.cs"</a:t>
+              <a:t>"src/EquipmentReservation.Application/Reservations/Create/"</a:t>
             </a:r>
             <a:r>
               <a:rPr sz="1049">
@@ -8700,7 +8634,7 @@
                 <a:ea typeface="Consolas"/>
                 <a:cs typeface="Consolas"/>
               </a:rPr>
-              <a:t>"tests/EquipmentReservation.Tests/ReservationTests.cs"</a:t>
+              <a:t>"tests/EquipmentReservation.Tests/Application/"</a:t>
             </a:r>
           </a:p>
           <a:p xmlns:a="http://schemas.openxmlformats.org/drawingml/2006/main">
@@ -13957,7 +13891,7 @@
                 <a:ea typeface="Aptos"/>
                 <a:cs typeface="Aptos"/>
               </a:rPr>
-              <a:t>На копији EquipmentReservation solution-а изводи се једна контролисана измена уз AI алат.</a:t>
+              <a:t>На копији EquipmentReservation solution-а изводи се једна контролисана измена уз Kova.</a:t>
             </a:r>
           </a:p>
         </p:txBody>
@@ -14181,7 +14115,7 @@
                 <a:ea typeface="Aptos"/>
                 <a:cs typeface="Aptos"/>
               </a:rPr>
-              <a:t>Прво користити architecture-reviewer само за анализу.</a:t>
+              <a:t>Skill architecture-review у режиму Plan: само анализа.</a:t>
             </a:r>
           </a:p>
         </p:txBody>
@@ -14293,7 +14227,7 @@
                 <a:ea typeface="Aptos"/>
                 <a:cs typeface="Aptos"/>
               </a:rPr>
-              <a:t>Implementer-у проследити усвојен план.</a:t>
+              <a:t>Skill implement-approved-plan у режиму Manual: усвојен план.</a:t>
             </a:r>
           </a:p>
         </p:txBody>
@@ -16014,7 +15948,7 @@
                 <a:ea typeface="Aptos Display"/>
                 <a:cs typeface="Aptos Display"/>
               </a:rPr>
-              <a:t>Циљ је да AI ради унутар граница solution-а и да сваки резултат остане проверљив стандардним развојним сигналима.</a:t>
+              <a:t>AI део примера ради у алату Kova за VS Code, а сваки резултат остаје проверљив стандардним развојним сигналима.</a:t>
             </a:r>
           </a:p>
         </p:txBody>
@@ -18055,7 +17989,7 @@
                 <a:ea typeface="Aptos"/>
                 <a:cs typeface="Aptos"/>
               </a:rPr>
-              <a:t>.ai</a:t>
+              <a:t>AGENTS.md</a:t>
             </a:r>
           </a:p>
         </p:txBody>
@@ -18224,7 +18158,7 @@
                 <a:ea typeface="Aptos"/>
                 <a:cs typeface="Aptos"/>
               </a:rPr>
-              <a:t>Skill/agent</a:t>
+              <a:t>Skill + режим</a:t>
             </a:r>
           </a:p>
         </p:txBody>
@@ -18280,7 +18214,7 @@
                 <a:ea typeface="Aptos"/>
                 <a:cs typeface="Aptos"/>
               </a:rPr>
-              <a:t>процедура</a:t>
+              <a:t>.kova/skills</a:t>
             </a:r>
           </a:p>
         </p:txBody>
@@ -22335,7 +22269,7 @@
                 <a:ea typeface="Aptos"/>
                 <a:cs typeface="Aptos"/>
               </a:rPr>
-              <a:t>Пројектна правила чувају се у датотеци .ai/AI_INSTRUCTIONS.md.</a:t>
+              <a:t>Пројектна правила чувају се у датотеци AGENTS.md у корену репозиторијума.</a:t>
             </a:r>
           </a:p>
         </p:txBody>
@@ -22629,7 +22563,7 @@
                 <a:ea typeface="Aptos"/>
                 <a:cs typeface="Aptos"/>
               </a:rPr>
-              <a:t>AI_USAGE садржи сажет запис употребе и донетих одлука.</a:t>
+              <a:t>Kova не учитава AGENTS.md аутоматски: сваки skill га чита као први корак.</a:t>
             </a:r>
           </a:p>
         </p:txBody>
@@ -22881,7 +22815,7 @@
                 <a:ea typeface="Aptos Display"/>
                 <a:cs typeface="Aptos Display"/>
               </a:rPr>
-              <a:t>AI_INSTRUCTIONS.md као архитектонско правило</a:t>
+              <a:t>AGENTS.md као архитектонско правило</a:t>
             </a:r>
           </a:p>
         </p:txBody>
@@ -24540,7 +24474,7 @@
                 <a:ea typeface="Aptos"/>
                 <a:cs typeface="Aptos"/>
               </a:rPr>
-              <a:t>SRP се примењује и на улоге у AI радном току.</a:t>
+              <a:t>Kova открива skill-ове у .kova/skills/&lt;назив&gt;/SKILL.md и учитава један изабрани.</a:t>
             </a:r>
           </a:p>
         </p:txBody>

--- a/01 Elementi Razvoja Softvera/02 Prezentacije/PPTX/06_Kontrolisan_AI_workflow.pptx
+++ b/01 Elementi Razvoja Softvera/02 Prezentacije/PPTX/06_Kontrolisan_AI_workflow.pptx
@@ -9802,7 +9802,7 @@
         <p:spPr>
           <a:xfrm xmlns:a="http://schemas.openxmlformats.org/drawingml/2006/main">
             <a:off x="914400" y="2342388"/>
-            <a:ext cx="5715000" cy="1511950"/>
+            <a:ext cx="5715000" cy="1294780"/>
           </a:xfrm>
           <a:prstGeom xmlns:a="http://schemas.openxmlformats.org/drawingml/2006/main" prst="roundRect">
             <a:avLst>
@@ -10070,7 +10070,7 @@
         <p:spPr>
           <a:xfrm xmlns:a="http://schemas.openxmlformats.org/drawingml/2006/main">
             <a:off x="1047750" y="2818638"/>
-            <a:ext cx="5448300" cy="2228850"/>
+            <a:ext cx="5448300" cy="2011680"/>
           </a:xfrm>
           <a:prstGeom xmlns:a="http://schemas.openxmlformats.org/drawingml/2006/main" prst="rect">
             <a:avLst/>
@@ -10159,18 +10159,18 @@
                 <a:ea typeface="Consolas"/>
                 <a:cs typeface="Consolas"/>
               </a:rPr>
-              <a:t>--</a:t>
-            </a:r>
-            <a:r>
-              <a:rPr sz="1125">
-                <a:solidFill>
-                  <a:srgbClr val="262B36"/>
+              <a:t>-c </a:t>
+            </a:r>
+            <a:r>
+              <a:rPr sz="1125" b="1">
+                <a:solidFill>
+                  <a:srgbClr val="7442C8"/>
                 </a:solidFill>
                 <a:latin typeface="Consolas"/>
                 <a:ea typeface="Consolas"/>
                 <a:cs typeface="Consolas"/>
               </a:rPr>
-              <a:t>configuration</a:t>
+              <a:t>Release</a:t>
             </a:r>
           </a:p>
           <a:p xmlns:a="http://schemas.openxmlformats.org/drawingml/2006/main">
@@ -10206,7 +10206,7 @@
                 <a:ea typeface="Consolas"/>
                 <a:cs typeface="Consolas"/>
               </a:rPr>
-              <a:t>    </a:t>
+              <a:t>dotnet test </a:t>
             </a:r>
             <a:r>
               <a:rPr sz="1125" b="1">
@@ -10217,7 +10217,106 @@
                 <a:ea typeface="Consolas"/>
                 <a:cs typeface="Consolas"/>
               </a:rPr>
+              <a:t>EquipmentReservation</a:t>
+            </a:r>
+            <a:r>
+              <a:rPr sz="1125">
+                <a:solidFill>
+                  <a:srgbClr val="5C6574"/>
+                </a:solidFill>
+                <a:latin typeface="Consolas"/>
+                <a:ea typeface="Consolas"/>
+                <a:cs typeface="Consolas"/>
+              </a:rPr>
+              <a:t>.</a:t>
+            </a:r>
+            <a:r>
+              <a:rPr sz="1125">
+                <a:solidFill>
+                  <a:srgbClr val="262B36"/>
+                </a:solidFill>
+                <a:latin typeface="Consolas"/>
+                <a:ea typeface="Consolas"/>
+                <a:cs typeface="Consolas"/>
+              </a:rPr>
+              <a:t>sln </a:t>
+            </a:r>
+            <a:r>
+              <a:rPr sz="1125">
+                <a:solidFill>
+                  <a:srgbClr val="5C6574"/>
+                </a:solidFill>
+                <a:latin typeface="Consolas"/>
+                <a:ea typeface="Consolas"/>
+                <a:cs typeface="Consolas"/>
+              </a:rPr>
+              <a:t>-c </a:t>
+            </a:r>
+            <a:r>
+              <a:rPr sz="1125" b="1">
+                <a:solidFill>
+                  <a:srgbClr val="7442C8"/>
+                </a:solidFill>
+                <a:latin typeface="Consolas"/>
+                <a:ea typeface="Consolas"/>
+                <a:cs typeface="Consolas"/>
+              </a:rPr>
               <a:t>Release</a:t>
+            </a:r>
+            <a:r>
+              <a:rPr sz="1125">
+                <a:solidFill>
+                  <a:srgbClr val="262B36"/>
+                </a:solidFill>
+                <a:latin typeface="Consolas"/>
+                <a:ea typeface="Consolas"/>
+                <a:cs typeface="Consolas"/>
+              </a:rPr>
+              <a:t> </a:t>
+            </a:r>
+            <a:r>
+              <a:rPr sz="1125">
+                <a:solidFill>
+                  <a:srgbClr val="5C6574"/>
+                </a:solidFill>
+                <a:latin typeface="Consolas"/>
+                <a:ea typeface="Consolas"/>
+                <a:cs typeface="Consolas"/>
+              </a:rPr>
+              <a:t>--</a:t>
+            </a:r>
+            <a:r>
+              <a:rPr sz="1125">
+                <a:solidFill>
+                  <a:srgbClr val="262B36"/>
+                </a:solidFill>
+                <a:latin typeface="Consolas"/>
+                <a:ea typeface="Consolas"/>
+                <a:cs typeface="Consolas"/>
+              </a:rPr>
+              <a:t>no</a:t>
+            </a:r>
+            <a:r>
+              <a:rPr sz="1125">
+                <a:solidFill>
+                  <a:srgbClr val="5C6574"/>
+                </a:solidFill>
+                <a:latin typeface="Consolas"/>
+                <a:ea typeface="Consolas"/>
+                <a:cs typeface="Consolas"/>
+              </a:rPr>
+              <a:t>-</a:t>
+            </a:r>
+            <a:r>
+              <a:rPr sz="1125">
+                <a:solidFill>
+                  <a:srgbClr val="262B36"/>
+                </a:solidFill>
+                <a:latin typeface="Consolas"/>
+                <a:ea typeface="Consolas"/>
+                <a:cs typeface="Consolas"/>
+              </a:rPr>
+              <a:t>build</a:t>
             </a:r>
           </a:p>
           <a:p xmlns:a="http://schemas.openxmlformats.org/drawingml/2006/main">
@@ -10243,199 +10342,6 @@
                 <a:cs typeface="Consolas"/>
               </a:rPr>
               <a:t> 3  </a:t>
-            </a:r>
-            <a:r>
-              <a:rPr sz="1125">
-                <a:solidFill>
-                  <a:srgbClr val="262B36"/>
-                </a:solidFill>
-                <a:latin typeface="Consolas"/>
-                <a:ea typeface="Consolas"/>
-                <a:cs typeface="Consolas"/>
-              </a:rPr>
-              <a:t>dotnet test </a:t>
-            </a:r>
-            <a:r>
-              <a:rPr sz="1125" b="1">
-                <a:solidFill>
-                  <a:srgbClr val="7442C8"/>
-                </a:solidFill>
-                <a:latin typeface="Consolas"/>
-                <a:ea typeface="Consolas"/>
-                <a:cs typeface="Consolas"/>
-              </a:rPr>
-              <a:t>EquipmentReservation</a:t>
-            </a:r>
-            <a:r>
-              <a:rPr sz="1125">
-                <a:solidFill>
-                  <a:srgbClr val="5C6574"/>
-                </a:solidFill>
-                <a:latin typeface="Consolas"/>
-                <a:ea typeface="Consolas"/>
-                <a:cs typeface="Consolas"/>
-              </a:rPr>
-              <a:t>.</a:t>
-            </a:r>
-            <a:r>
-              <a:rPr sz="1125">
-                <a:solidFill>
-                  <a:srgbClr val="262B36"/>
-                </a:solidFill>
-                <a:latin typeface="Consolas"/>
-                <a:ea typeface="Consolas"/>
-                <a:cs typeface="Consolas"/>
-              </a:rPr>
-              <a:t>sln </a:t>
-            </a:r>
-            <a:r>
-              <a:rPr sz="1125">
-                <a:solidFill>
-                  <a:srgbClr val="5C6574"/>
-                </a:solidFill>
-                <a:latin typeface="Consolas"/>
-                <a:ea typeface="Consolas"/>
-                <a:cs typeface="Consolas"/>
-              </a:rPr>
-              <a:t>--</a:t>
-            </a:r>
-            <a:r>
-              <a:rPr sz="1125">
-                <a:solidFill>
-                  <a:srgbClr val="262B36"/>
-                </a:solidFill>
-                <a:latin typeface="Consolas"/>
-                <a:ea typeface="Consolas"/>
-                <a:cs typeface="Consolas"/>
-              </a:rPr>
-              <a:t>configuration</a:t>
-            </a:r>
-          </a:p>
-          <a:p xmlns:a="http://schemas.openxmlformats.org/drawingml/2006/main">
-            <a:pPr>
-              <a:lnSpc>
-                <a:spcPct val="105000"/>
-              </a:lnSpc>
-              <a:spcBef>
-                <a:spcPts val="0"/>
-              </a:spcBef>
-              <a:spcAft>
-                <a:spcPts val="0"/>
-              </a:spcAft>
-              <a:buNone/>
-            </a:pPr>
-            <a:r>
-              <a:rPr sz="1125">
-                <a:solidFill>
-                  <a:srgbClr val="8E97A6"/>
-                </a:solidFill>
-                <a:latin typeface="Consolas"/>
-                <a:ea typeface="Consolas"/>
-                <a:cs typeface="Consolas"/>
-              </a:rPr>
-              <a:t> 4  </a:t>
-            </a:r>
-            <a:r>
-              <a:rPr sz="1125">
-                <a:solidFill>
-                  <a:srgbClr val="262B36"/>
-                </a:solidFill>
-                <a:latin typeface="Consolas"/>
-                <a:ea typeface="Consolas"/>
-                <a:cs typeface="Consolas"/>
-              </a:rPr>
-              <a:t>    </a:t>
-            </a:r>
-            <a:r>
-              <a:rPr sz="1125" b="1">
-                <a:solidFill>
-                  <a:srgbClr val="7442C8"/>
-                </a:solidFill>
-                <a:latin typeface="Consolas"/>
-                <a:ea typeface="Consolas"/>
-                <a:cs typeface="Consolas"/>
-              </a:rPr>
-              <a:t>Release</a:t>
-            </a:r>
-            <a:r>
-              <a:rPr sz="1125">
-                <a:solidFill>
-                  <a:srgbClr val="262B36"/>
-                </a:solidFill>
-                <a:latin typeface="Consolas"/>
-                <a:ea typeface="Consolas"/>
-                <a:cs typeface="Consolas"/>
-              </a:rPr>
-              <a:t> </a:t>
-            </a:r>
-            <a:r>
-              <a:rPr sz="1125">
-                <a:solidFill>
-                  <a:srgbClr val="5C6574"/>
-                </a:solidFill>
-                <a:latin typeface="Consolas"/>
-                <a:ea typeface="Consolas"/>
-                <a:cs typeface="Consolas"/>
-              </a:rPr>
-              <a:t>--</a:t>
-            </a:r>
-            <a:r>
-              <a:rPr sz="1125">
-                <a:solidFill>
-                  <a:srgbClr val="262B36"/>
-                </a:solidFill>
-                <a:latin typeface="Consolas"/>
-                <a:ea typeface="Consolas"/>
-                <a:cs typeface="Consolas"/>
-              </a:rPr>
-              <a:t>no</a:t>
-            </a:r>
-            <a:r>
-              <a:rPr sz="1125">
-                <a:solidFill>
-                  <a:srgbClr val="5C6574"/>
-                </a:solidFill>
-                <a:latin typeface="Consolas"/>
-                <a:ea typeface="Consolas"/>
-                <a:cs typeface="Consolas"/>
-              </a:rPr>
-              <a:t>-</a:t>
-            </a:r>
-            <a:r>
-              <a:rPr sz="1125">
-                <a:solidFill>
-                  <a:srgbClr val="262B36"/>
-                </a:solidFill>
-                <a:latin typeface="Consolas"/>
-                <a:ea typeface="Consolas"/>
-                <a:cs typeface="Consolas"/>
-              </a:rPr>
-              <a:t>build</a:t>
-            </a:r>
-          </a:p>
-          <a:p xmlns:a="http://schemas.openxmlformats.org/drawingml/2006/main">
-            <a:pPr>
-              <a:lnSpc>
-                <a:spcPct val="105000"/>
-              </a:lnSpc>
-              <a:spcBef>
-                <a:spcPts val="0"/>
-              </a:spcBef>
-              <a:spcAft>
-                <a:spcPts val="0"/>
-              </a:spcAft>
-              <a:buNone/>
-            </a:pPr>
-            <a:r>
-              <a:rPr sz="1125">
-                <a:solidFill>
-                  <a:srgbClr val="8E97A6"/>
-                </a:solidFill>
-                <a:latin typeface="Consolas"/>
-                <a:ea typeface="Consolas"/>
-                <a:cs typeface="Consolas"/>
-              </a:rPr>
-              <a:t> 5  </a:t>
             </a:r>
             <a:r>
               <a:rPr sz="1125">
@@ -22563,7 +22469,7 @@
                 <a:ea typeface="Aptos"/>
                 <a:cs typeface="Aptos"/>
               </a:rPr>
-              <a:t>Kova не учитава AGENTS.md аутоматски: сваки skill га чита као први корак.</a:t>
+              <a:t>Kova 0.3.2 учитава AGENTS.md аутоматски у свако покретање, пре изабраног skill-а.</a:t>
             </a:r>
           </a:p>
         </p:txBody>
